--- a/slide/themes/src/29_silent flow.pptx
+++ b/slide/themes/src/29_silent flow.pptx
@@ -5540,9 +5540,6 @@
                     <a:lumMod val="95000"/>
                   </a:schemeClr>
                 </a:solidFill>
-                <a:latin typeface="Arial Black"/>
-                <a:ea typeface="Arial Black"/>
-                <a:cs typeface="Arial Black"/>
               </a:defRPr>
             </a:lvl1pPr>
             <a:lvl2pPr>
@@ -5552,9 +5549,6 @@
                     <a:lumMod val="95000"/>
                   </a:schemeClr>
                 </a:solidFill>
-                <a:latin typeface="Arial Black"/>
-                <a:ea typeface="Arial Black"/>
-                <a:cs typeface="Arial Black"/>
               </a:defRPr>
             </a:lvl2pPr>
             <a:lvl3pPr>
@@ -5564,9 +5558,6 @@
                     <a:lumMod val="95000"/>
                   </a:schemeClr>
                 </a:solidFill>
-                <a:latin typeface="Arial Black"/>
-                <a:ea typeface="Arial Black"/>
-                <a:cs typeface="Arial Black"/>
               </a:defRPr>
             </a:lvl3pPr>
             <a:lvl4pPr>
@@ -5576,9 +5567,6 @@
                     <a:lumMod val="95000"/>
                   </a:schemeClr>
                 </a:solidFill>
-                <a:latin typeface="Arial Black"/>
-                <a:ea typeface="Arial Black"/>
-                <a:cs typeface="Arial Black"/>
               </a:defRPr>
             </a:lvl4pPr>
             <a:lvl5pPr>
@@ -5588,9 +5576,6 @@
                     <a:lumMod val="95000"/>
                   </a:schemeClr>
                 </a:solidFill>
-                <a:latin typeface="Arial Black"/>
-                <a:ea typeface="Arial Black"/>
-                <a:cs typeface="Arial Black"/>
               </a:defRPr>
             </a:lvl5pPr>
             <a:lvl6pPr>
@@ -5600,9 +5585,6 @@
                     <a:lumMod val="95000"/>
                   </a:schemeClr>
                 </a:solidFill>
-                <a:latin typeface="Arial Black"/>
-                <a:ea typeface="Arial Black"/>
-                <a:cs typeface="Arial Black"/>
               </a:defRPr>
             </a:lvl6pPr>
             <a:lvl7pPr>
@@ -5612,9 +5594,6 @@
                     <a:lumMod val="95000"/>
                   </a:schemeClr>
                 </a:solidFill>
-                <a:latin typeface="Arial Black"/>
-                <a:ea typeface="Arial Black"/>
-                <a:cs typeface="Arial Black"/>
               </a:defRPr>
             </a:lvl7pPr>
             <a:lvl8pPr>
@@ -5624,9 +5603,6 @@
                     <a:lumMod val="95000"/>
                   </a:schemeClr>
                 </a:solidFill>
-                <a:latin typeface="Arial Black"/>
-                <a:ea typeface="Arial Black"/>
-                <a:cs typeface="Arial Black"/>
               </a:defRPr>
             </a:lvl8pPr>
             <a:lvl9pPr>
@@ -5636,9 +5612,6 @@
                     <a:lumMod val="95000"/>
                   </a:schemeClr>
                 </a:solidFill>
-                <a:latin typeface="Arial Black"/>
-                <a:ea typeface="Arial Black"/>
-                <a:cs typeface="Arial Black"/>
               </a:defRPr>
             </a:lvl9pPr>
           </a:lstStyle>
@@ -6434,13 +6407,13 @@
     </a:clrScheme>
     <a:fontScheme name="Office Theme">
       <a:majorFont>
-        <a:latin typeface="Arial"/>
-        <a:ea typeface="SimSun"/>
+        <a:latin typeface="Arial Black"/>
+        <a:ea typeface="SimHei"/>
         <a:cs typeface="Arial"/>
       </a:majorFont>
       <a:minorFont>
         <a:latin typeface="Arial"/>
-        <a:ea typeface="SimSun"/>
+        <a:ea typeface="Microsoft YaHei"/>
         <a:cs typeface="Arial"/>
       </a:minorFont>
     </a:fontScheme>
@@ -6671,13 +6644,13 @@
     </a:clrScheme>
     <a:fontScheme name="Arial">
       <a:majorFont>
-        <a:latin typeface="Arial"/>
-        <a:ea typeface="Arial"/>
+        <a:latin typeface="Arial Black"/>
+        <a:ea typeface="SimHei"/>
         <a:cs typeface="Arial"/>
       </a:majorFont>
       <a:minorFont>
         <a:latin typeface="Arial"/>
-        <a:ea typeface="Arial"/>
+        <a:ea typeface="Microsoft YaHei"/>
         <a:cs typeface="Arial"/>
       </a:minorFont>
     </a:fontScheme>
